--- a/KINN_Radar.pptx
+++ b/KINN_Radar.pptx
@@ -313,7 +313,7 @@
           <a:p>
             <a:fld id="{5BCAD085-E8A6-8845-BD4E-CB4CCA059FC4}" type="datetimeFigureOut">
               <a:rPr lang="en-US" smtClean="0"/>
-              <a:t>6/18/26</a:t>
+              <a:t>6/19/26</a:t>
             </a:fld>
             <a:endParaRPr lang="en-US"/>
           </a:p>
@@ -481,7 +481,7 @@
           <a:p>
             <a:fld id="{5BCAD085-E8A6-8845-BD4E-CB4CCA059FC4}" type="datetimeFigureOut">
               <a:rPr lang="en-US" smtClean="0"/>
-              <a:t>6/18/26</a:t>
+              <a:t>6/19/26</a:t>
             </a:fld>
             <a:endParaRPr lang="en-US"/>
           </a:p>
@@ -659,7 +659,7 @@
           <a:p>
             <a:fld id="{5BCAD085-E8A6-8845-BD4E-CB4CCA059FC4}" type="datetimeFigureOut">
               <a:rPr lang="en-US" smtClean="0"/>
-              <a:t>6/18/26</a:t>
+              <a:t>6/19/26</a:t>
             </a:fld>
             <a:endParaRPr lang="en-US"/>
           </a:p>
@@ -827,7 +827,7 @@
           <a:p>
             <a:fld id="{5BCAD085-E8A6-8845-BD4E-CB4CCA059FC4}" type="datetimeFigureOut">
               <a:rPr lang="en-US" smtClean="0"/>
-              <a:t>6/18/26</a:t>
+              <a:t>6/19/26</a:t>
             </a:fld>
             <a:endParaRPr lang="en-US"/>
           </a:p>
@@ -1072,7 +1072,7 @@
           <a:p>
             <a:fld id="{5BCAD085-E8A6-8845-BD4E-CB4CCA059FC4}" type="datetimeFigureOut">
               <a:rPr lang="en-US" smtClean="0"/>
-              <a:t>6/18/26</a:t>
+              <a:t>6/19/26</a:t>
             </a:fld>
             <a:endParaRPr lang="en-US"/>
           </a:p>
@@ -1357,7 +1357,7 @@
           <a:p>
             <a:fld id="{5BCAD085-E8A6-8845-BD4E-CB4CCA059FC4}" type="datetimeFigureOut">
               <a:rPr lang="en-US" smtClean="0"/>
-              <a:t>6/18/26</a:t>
+              <a:t>6/19/26</a:t>
             </a:fld>
             <a:endParaRPr lang="en-US"/>
           </a:p>
@@ -1776,7 +1776,7 @@
           <a:p>
             <a:fld id="{5BCAD085-E8A6-8845-BD4E-CB4CCA059FC4}" type="datetimeFigureOut">
               <a:rPr lang="en-US" smtClean="0"/>
-              <a:t>6/18/26</a:t>
+              <a:t>6/19/26</a:t>
             </a:fld>
             <a:endParaRPr lang="en-US"/>
           </a:p>
@@ -1893,7 +1893,7 @@
           <a:p>
             <a:fld id="{5BCAD085-E8A6-8845-BD4E-CB4CCA059FC4}" type="datetimeFigureOut">
               <a:rPr lang="en-US" smtClean="0"/>
-              <a:t>6/18/26</a:t>
+              <a:t>6/19/26</a:t>
             </a:fld>
             <a:endParaRPr lang="en-US"/>
           </a:p>
@@ -1988,7 +1988,7 @@
           <a:p>
             <a:fld id="{5BCAD085-E8A6-8845-BD4E-CB4CCA059FC4}" type="datetimeFigureOut">
               <a:rPr lang="en-US" smtClean="0"/>
-              <a:t>6/18/26</a:t>
+              <a:t>6/19/26</a:t>
             </a:fld>
             <a:endParaRPr lang="en-US"/>
           </a:p>
@@ -2263,7 +2263,7 @@
           <a:p>
             <a:fld id="{5BCAD085-E8A6-8845-BD4E-CB4CCA059FC4}" type="datetimeFigureOut">
               <a:rPr lang="en-US" smtClean="0"/>
-              <a:t>6/18/26</a:t>
+              <a:t>6/19/26</a:t>
             </a:fld>
             <a:endParaRPr lang="en-US"/>
           </a:p>
@@ -2515,7 +2515,7 @@
           <a:p>
             <a:fld id="{5BCAD085-E8A6-8845-BD4E-CB4CCA059FC4}" type="datetimeFigureOut">
               <a:rPr lang="en-US" smtClean="0"/>
-              <a:t>6/18/26</a:t>
+              <a:t>6/19/26</a:t>
             </a:fld>
             <a:endParaRPr lang="en-US"/>
           </a:p>
@@ -2726,7 +2726,7 @@
           <a:p>
             <a:fld id="{5BCAD085-E8A6-8845-BD4E-CB4CCA059FC4}" type="datetimeFigureOut">
               <a:rPr lang="en-US" smtClean="0"/>
-              <a:t>6/18/26</a:t>
+              <a:t>6/19/26</a:t>
             </a:fld>
             <a:endParaRPr lang="en-US"/>
           </a:p>
@@ -14164,14 +14164,154 @@
               </a:spcAft>
             </a:pPr>
             <a:r>
-              <a:rPr sz="1700" b="0" i="0">
+              <a:rPr sz="1700" b="0" i="0" dirty="0">
                 <a:solidFill>
                   <a:srgbClr val="3A3F4B"/>
                 </a:solidFill>
                 <a:latin typeface="Poppins" pitchFamily="2" charset="77"/>
                 <a:cs typeface="Poppins" pitchFamily="2" charset="77"/>
               </a:rPr>
-              <a:t>KINN reconstruit vos processus réels (façon Celonis) et détecte où ça bloque.</a:t>
+              <a:t>KINN </a:t>
+            </a:r>
+            <a:r>
+              <a:rPr sz="1700" b="0" i="0" dirty="0" err="1">
+                <a:solidFill>
+                  <a:srgbClr val="3A3F4B"/>
+                </a:solidFill>
+                <a:latin typeface="Poppins" pitchFamily="2" charset="77"/>
+                <a:cs typeface="Poppins" pitchFamily="2" charset="77"/>
+              </a:rPr>
+              <a:t>reconstruit</a:t>
+            </a:r>
+            <a:r>
+              <a:rPr sz="1700" b="0" i="0" dirty="0">
+                <a:solidFill>
+                  <a:srgbClr val="3A3F4B"/>
+                </a:solidFill>
+                <a:latin typeface="Poppins" pitchFamily="2" charset="77"/>
+                <a:cs typeface="Poppins" pitchFamily="2" charset="77"/>
+              </a:rPr>
+              <a:t> </a:t>
+            </a:r>
+            <a:r>
+              <a:rPr sz="1700" b="0" i="0" dirty="0" err="1">
+                <a:solidFill>
+                  <a:srgbClr val="3A3F4B"/>
+                </a:solidFill>
+                <a:latin typeface="Poppins" pitchFamily="2" charset="77"/>
+                <a:cs typeface="Poppins" pitchFamily="2" charset="77"/>
+              </a:rPr>
+              <a:t>vos</a:t>
+            </a:r>
+            <a:r>
+              <a:rPr sz="1700" b="0" i="0" dirty="0">
+                <a:solidFill>
+                  <a:srgbClr val="3A3F4B"/>
+                </a:solidFill>
+                <a:latin typeface="Poppins" pitchFamily="2" charset="77"/>
+                <a:cs typeface="Poppins" pitchFamily="2" charset="77"/>
+              </a:rPr>
+              <a:t> processus </a:t>
+            </a:r>
+            <a:r>
+              <a:rPr sz="1700" b="0" i="0" dirty="0" err="1">
+                <a:solidFill>
+                  <a:srgbClr val="3A3F4B"/>
+                </a:solidFill>
+                <a:latin typeface="Poppins" pitchFamily="2" charset="77"/>
+                <a:cs typeface="Poppins" pitchFamily="2" charset="77"/>
+              </a:rPr>
+              <a:t>réels</a:t>
+            </a:r>
+            <a:r>
+              <a:rPr sz="1700" b="0" i="0" dirty="0">
+                <a:solidFill>
+                  <a:srgbClr val="3A3F4B"/>
+                </a:solidFill>
+                <a:latin typeface="Poppins" pitchFamily="2" charset="77"/>
+                <a:cs typeface="Poppins" pitchFamily="2" charset="77"/>
+              </a:rPr>
+              <a:t> et </a:t>
+            </a:r>
+            <a:r>
+              <a:rPr sz="1700" b="0" i="0" dirty="0" err="1">
+                <a:solidFill>
+                  <a:srgbClr val="3A3F4B"/>
+                </a:solidFill>
+                <a:latin typeface="Poppins" pitchFamily="2" charset="77"/>
+                <a:cs typeface="Poppins" pitchFamily="2" charset="77"/>
+              </a:rPr>
+              <a:t>détecte</a:t>
+            </a:r>
+            <a:r>
+              <a:rPr sz="1700" b="0" i="0" dirty="0">
+                <a:solidFill>
+                  <a:srgbClr val="3A3F4B"/>
+                </a:solidFill>
+                <a:latin typeface="Poppins" pitchFamily="2" charset="77"/>
+                <a:cs typeface="Poppins" pitchFamily="2" charset="77"/>
+              </a:rPr>
+              <a:t> </a:t>
+            </a:r>
+            <a:r>
+              <a:rPr sz="1700" b="0" i="0" dirty="0" err="1">
+                <a:solidFill>
+                  <a:srgbClr val="3A3F4B"/>
+                </a:solidFill>
+                <a:latin typeface="Poppins" pitchFamily="2" charset="77"/>
+                <a:cs typeface="Poppins" pitchFamily="2" charset="77"/>
+              </a:rPr>
+              <a:t>où</a:t>
+            </a:r>
+            <a:r>
+              <a:rPr sz="1700" b="0" i="0" dirty="0">
+                <a:solidFill>
+                  <a:srgbClr val="3A3F4B"/>
+                </a:solidFill>
+                <a:latin typeface="Poppins" pitchFamily="2" charset="77"/>
+                <a:cs typeface="Poppins" pitchFamily="2" charset="77"/>
+              </a:rPr>
+              <a:t> </a:t>
+            </a:r>
+            <a:r>
+              <a:rPr sz="1700" b="0" i="0" dirty="0" err="1">
+                <a:solidFill>
+                  <a:srgbClr val="3A3F4B"/>
+                </a:solidFill>
+                <a:latin typeface="Poppins" pitchFamily="2" charset="77"/>
+                <a:cs typeface="Poppins" pitchFamily="2" charset="77"/>
+              </a:rPr>
+              <a:t>ça</a:t>
+            </a:r>
+            <a:r>
+              <a:rPr sz="1700" b="0" i="0" dirty="0">
+                <a:solidFill>
+                  <a:srgbClr val="3A3F4B"/>
+                </a:solidFill>
+                <a:latin typeface="Poppins" pitchFamily="2" charset="77"/>
+                <a:cs typeface="Poppins" pitchFamily="2" charset="77"/>
+              </a:rPr>
+              <a:t> </a:t>
+            </a:r>
+            <a:r>
+              <a:rPr sz="1700" b="0" i="0" dirty="0" err="1">
+                <a:solidFill>
+                  <a:srgbClr val="3A3F4B"/>
+                </a:solidFill>
+                <a:latin typeface="Poppins" pitchFamily="2" charset="77"/>
+                <a:cs typeface="Poppins" pitchFamily="2" charset="77"/>
+              </a:rPr>
+              <a:t>bloque</a:t>
+            </a:r>
+            <a:r>
+              <a:rPr sz="1700" b="0" i="0" dirty="0">
+                <a:solidFill>
+                  <a:srgbClr val="3A3F4B"/>
+                </a:solidFill>
+                <a:latin typeface="Poppins" pitchFamily="2" charset="77"/>
+                <a:cs typeface="Poppins" pitchFamily="2" charset="77"/>
+              </a:rPr>
+              <a:t>.</a:t>
             </a:r>
           </a:p>
         </p:txBody>
